--- a/docs/Presentation.pptx
+++ b/docs/Presentation.pptx
@@ -4369,9 +4369,6 @@
               </a:rPr>
               <a:t> и запустить на хостинге.</a:t>
             </a:r>
-            <a:endParaRPr lang="ru-RU" sz="2400" dirty="0" smtClean="0">
-              <a:latin typeface="Trebuchet MS" panose="020B0603020202020204" pitchFamily="34" charset="0"/>
-            </a:endParaRPr>
           </a:p>
         </p:txBody>
       </p:sp>
@@ -5288,29 +5285,7 @@
                 </a:solidFill>
                 <a:latin typeface="Trebuchet MS" panose="020B0603020202020204" pitchFamily="34" charset="0"/>
               </a:rPr>
-              <a:t>хостинг</a:t>
-            </a:r>
-            <a:r>
-              <a:rPr lang="ru-RU" altLang="ru-RU" sz="2000" dirty="0" smtClean="0">
-                <a:solidFill>
-                  <a:schemeClr val="bg2">
-                    <a:lumMod val="25000"/>
-                  </a:schemeClr>
-                </a:solidFill>
-                <a:latin typeface="Trebuchet MS" panose="020B0603020202020204" pitchFamily="34" charset="0"/>
-              </a:rPr>
-              <a:t> </a:t>
-            </a:r>
-            <a:r>
-              <a:rPr lang="ru-RU" altLang="ru-RU" sz="2000" dirty="0" smtClean="0">
-                <a:solidFill>
-                  <a:schemeClr val="bg2">
-                    <a:lumMod val="25000"/>
-                  </a:schemeClr>
-                </a:solidFill>
-                <a:latin typeface="Trebuchet MS" panose="020B0603020202020204" pitchFamily="34" charset="0"/>
-              </a:rPr>
-              <a:t>и хранение изменений кода</a:t>
+              <a:t>хостинг и хранение изменений кода</a:t>
             </a:r>
             <a:endParaRPr lang="ru-RU" altLang="ru-RU" sz="2000" dirty="0">
               <a:solidFill>
@@ -9049,6 +9024,36 @@
           </a:p>
         </p:txBody>
       </p:sp>
+      <p:pic>
+        <p:nvPicPr>
+          <p:cNvPr id="17" name="Рисунок 16"/>
+          <p:cNvPicPr>
+            <a:picLocks noChangeAspect="1"/>
+          </p:cNvPicPr>
+          <p:nvPr/>
+        </p:nvPicPr>
+        <p:blipFill>
+          <a:blip r:embed="rId5" cstate="print">
+            <a:extLst>
+              <a:ext uri="{28A0092B-C50C-407E-A947-70E740481C1C}">
+                <a14:useLocalDpi xmlns:a14="http://schemas.microsoft.com/office/drawing/2010/main" val="0"/>
+              </a:ext>
+            </a:extLst>
+          </a:blip>
+          <a:stretch>
+            <a:fillRect/>
+          </a:stretch>
+        </p:blipFill>
+        <p:spPr>
+          <a:xfrm>
+            <a:off x="3603003" y="5772101"/>
+            <a:ext cx="3882107" cy="3882107"/>
+          </a:xfrm>
+          <a:prstGeom prst="rect">
+            <a:avLst/>
+          </a:prstGeom>
+        </p:spPr>
+      </p:pic>
     </p:spTree>
   </p:cSld>
   <p:clrMapOvr>

--- a/docs/Presentation.pptx
+++ b/docs/Presentation.pptx
@@ -2619,6 +2619,12 @@
           <a:p>
             <a:pPr algn="ctr"/>
             <a:r>
+              <a:rPr lang="ru-RU" sz="4800" dirty="0" smtClean="0">
+                <a:latin typeface="Trebuchet MS" panose="020B0603020202020204" pitchFamily="34" charset="0"/>
+              </a:rPr>
+              <a:t>Веб-приложение </a:t>
+            </a:r>
+            <a:r>
               <a:rPr lang="en-US" sz="4800" dirty="0" err="1" smtClean="0">
                 <a:latin typeface="Trebuchet MS" panose="020B0603020202020204" pitchFamily="34" charset="0"/>
               </a:rPr>
@@ -2628,7 +2634,13 @@
               <a:rPr lang="en-US" sz="4800" dirty="0" smtClean="0">
                 <a:latin typeface="Trebuchet MS" panose="020B0603020202020204" pitchFamily="34" charset="0"/>
               </a:rPr>
-              <a:t> LMS</a:t>
+              <a:t> </a:t>
+            </a:r>
+            <a:r>
+              <a:rPr lang="en-US" sz="4800" dirty="0" smtClean="0">
+                <a:latin typeface="Trebuchet MS" panose="020B0603020202020204" pitchFamily="34" charset="0"/>
+              </a:rPr>
+              <a:t>LMS</a:t>
             </a:r>
             <a:endParaRPr lang="ru-RU" sz="4800" dirty="0">
               <a:latin typeface="Trebuchet MS" panose="020B0603020202020204" pitchFamily="34" charset="0"/>
@@ -3041,7 +3053,28 @@
                 </a:solidFill>
                 <a:latin typeface="Trebuchet MS" panose="020B0603020202020204" pitchFamily="34" charset="0"/>
               </a:rPr>
-              <a:t>Цель и задачи проекта</a:t>
+              <a:t>Цель и задачи </a:t>
+            </a:r>
+            <a:r>
+              <a:rPr lang="ru-RU" altLang="ru-RU" sz="3500" dirty="0" smtClean="0">
+                <a:solidFill>
+                  <a:schemeClr val="tx1"/>
+                </a:solidFill>
+                <a:latin typeface="Trebuchet MS" panose="020B0603020202020204" pitchFamily="34" charset="0"/>
+              </a:rPr>
+              <a:t>проекта</a:t>
+            </a:r>
+          </a:p>
+          <a:p>
+            <a:pPr marL="457200" indent="-457200"/>
+            <a:r>
+              <a:rPr lang="ru-RU" altLang="ru-RU" sz="3500" dirty="0" smtClean="0">
+                <a:solidFill>
+                  <a:schemeClr val="tx1"/>
+                </a:solidFill>
+                <a:latin typeface="Trebuchet MS" panose="020B0603020202020204" pitchFamily="34" charset="0"/>
+              </a:rPr>
+              <a:t>3) Просмотр интерфейса</a:t>
             </a:r>
             <a:endParaRPr lang="en-US" altLang="ru-RU" sz="3500" dirty="0" smtClean="0">
               <a:solidFill>
@@ -3053,13 +3086,22 @@
           <a:p>
             <a:pPr marL="457200" indent="-457200"/>
             <a:r>
+              <a:rPr lang="ru-RU" altLang="ru-RU" sz="3500" dirty="0">
+                <a:solidFill>
+                  <a:schemeClr val="tx1"/>
+                </a:solidFill>
+                <a:latin typeface="Trebuchet MS" panose="020B0603020202020204" pitchFamily="34" charset="0"/>
+              </a:rPr>
+              <a:t>4</a:t>
+            </a:r>
+            <a:r>
               <a:rPr lang="en-US" altLang="ru-RU" sz="3500" dirty="0" smtClean="0">
                 <a:solidFill>
                   <a:schemeClr val="tx1"/>
                 </a:solidFill>
                 <a:latin typeface="Trebuchet MS" panose="020B0603020202020204" pitchFamily="34" charset="0"/>
               </a:rPr>
-              <a:t>3) </a:t>
+              <a:t>) </a:t>
             </a:r>
             <a:r>
               <a:rPr lang="ru-RU" altLang="ru-RU" sz="3500" dirty="0" smtClean="0">
@@ -3821,7 +3863,7 @@
         <p:spPr>
           <a:xfrm>
             <a:off x="7286752" y="551102"/>
-            <a:ext cx="8467598" cy="7622599"/>
+            <a:ext cx="8467598" cy="4667944"/>
           </a:xfrm>
           <a:prstGeom prst="rect">
             <a:avLst/>
@@ -3837,12 +3879,24 @@
               <a:buNone/>
             </a:pPr>
             <a:r>
-              <a:rPr lang="ru-RU" sz="3000" dirty="0" smtClean="0">
+              <a:rPr lang="ru-RU" sz="2400" dirty="0" smtClean="0">
                 <a:latin typeface="Trebuchet MS" panose="020B0603020202020204" pitchFamily="34" charset="0"/>
               </a:rPr>
-              <a:t>Сейчас многие онлайн-курсы учат слишком долго: сначала нужно посмотреть несколько часов лекций, потом прочитать теорию, и только потом — пара простых заданий. Новички, школьники и студенты теряют мотивацию, потому что нет быстрого результата.</a:t>
-            </a:r>
-            <a:endParaRPr lang="en-US" sz="3000" dirty="0" smtClean="0">
+              <a:t>Сейчас </a:t>
+            </a:r>
+            <a:r>
+              <a:rPr lang="ru-RU" sz="2400" dirty="0" smtClean="0">
+                <a:latin typeface="Trebuchet MS" panose="020B0603020202020204" pitchFamily="34" charset="0"/>
+              </a:rPr>
+              <a:t>многие онлайн-курсы учат слишком долго: сначала нужно посмотреть несколько часов лекций, потом прочитать теорию, и только потом — пара простых заданий. Новички, школьники и студенты теряют мотивацию, потому что нет быстрого результата</a:t>
+            </a:r>
+            <a:r>
+              <a:rPr lang="ru-RU" sz="2400" dirty="0" smtClean="0">
+                <a:latin typeface="Trebuchet MS" panose="020B0603020202020204" pitchFamily="34" charset="0"/>
+              </a:rPr>
+              <a:t>.</a:t>
+            </a:r>
+            <a:endParaRPr lang="ru-RU" sz="2400" dirty="0">
               <a:latin typeface="Trebuchet MS" panose="020B0603020202020204" pitchFamily="34" charset="0"/>
             </a:endParaRPr>
           </a:p>
@@ -3850,7 +3904,7 @@
             <a:pPr marL="0" indent="0">
               <a:buNone/>
             </a:pPr>
-            <a:endParaRPr lang="ru-RU" sz="3000" dirty="0" smtClean="0">
+            <a:endParaRPr lang="ru-RU" sz="2400" dirty="0" smtClean="0">
               <a:latin typeface="Trebuchet MS" panose="020B0603020202020204" pitchFamily="34" charset="0"/>
             </a:endParaRPr>
           </a:p>
@@ -3859,24 +3913,42 @@
               <a:buNone/>
             </a:pPr>
             <a:r>
-              <a:rPr lang="ru-RU" sz="3000" dirty="0" smtClean="0">
+              <a:rPr lang="ru-RU" sz="2400" dirty="0" smtClean="0">
                 <a:latin typeface="Trebuchet MS" panose="020B0603020202020204" pitchFamily="34" charset="0"/>
               </a:rPr>
-              <a:t>Особенно остро это чувствуется при подготовке к олимпиадам по промышленному  программированию (например, Высшая проба</a:t>
-            </a:r>
-            <a:r>
-              <a:rPr lang="en-US" sz="3000" dirty="0" smtClean="0">
+              <a:t>Особенно это </a:t>
+            </a:r>
+            <a:r>
+              <a:rPr lang="ru-RU" sz="2400" dirty="0" smtClean="0">
+                <a:latin typeface="Trebuchet MS" panose="020B0603020202020204" pitchFamily="34" charset="0"/>
+              </a:rPr>
+              <a:t>чувствуется при подготовке к олимпиадам по промышленному  программированию (например, Высшая проба</a:t>
+            </a:r>
+            <a:r>
+              <a:rPr lang="en-US" sz="2400" dirty="0" smtClean="0">
                 <a:latin typeface="Trebuchet MS" panose="020B0603020202020204" pitchFamily="34" charset="0"/>
               </a:rPr>
               <a:t>, PROD</a:t>
             </a:r>
             <a:r>
-              <a:rPr lang="ru-RU" sz="3000" dirty="0" smtClean="0">
+              <a:rPr lang="ru-RU" sz="2400" dirty="0" smtClean="0">
                 <a:latin typeface="Trebuchet MS" panose="020B0603020202020204" pitchFamily="34" charset="0"/>
               </a:rPr>
-              <a:t>). Там нужны не знания лекций, а навык решения конкретных задач. Наш LMS меняет подход: меньше слов — сразу практика. Это идеально подходит тем, кто хочет «набить руку».</a:t>
-            </a:r>
-            <a:endParaRPr lang="ru-RU" sz="3000" dirty="0">
+              <a:t>). Там нужны не знания лекций, а навык решения конкретных задач. </a:t>
+            </a:r>
+            <a:r>
+              <a:rPr lang="ru-RU" sz="2400" dirty="0" smtClean="0">
+                <a:latin typeface="Trebuchet MS" panose="020B0603020202020204" pitchFamily="34" charset="0"/>
+              </a:rPr>
+              <a:t>LMS </a:t>
+            </a:r>
+            <a:r>
+              <a:rPr lang="ru-RU" sz="2400" dirty="0" smtClean="0">
+                <a:latin typeface="Trebuchet MS" panose="020B0603020202020204" pitchFamily="34" charset="0"/>
+              </a:rPr>
+              <a:t>меняет подход: меньше слов — сразу практика. Это идеально подходит тем, кто хочет «набить руку».</a:t>
+            </a:r>
+            <a:endParaRPr lang="ru-RU" sz="2400" dirty="0">
               <a:latin typeface="Trebuchet MS" panose="020B0603020202020204" pitchFamily="34" charset="0"/>
             </a:endParaRPr>
           </a:p>
@@ -3941,6 +4013,30 @@
           </a:p>
         </p:txBody>
       </p:sp>
+      <p:pic>
+        <p:nvPicPr>
+          <p:cNvPr id="9" name="Рисунок 8"/>
+          <p:cNvPicPr>
+            <a:picLocks noChangeAspect="1"/>
+          </p:cNvPicPr>
+          <p:nvPr/>
+        </p:nvPicPr>
+        <p:blipFill>
+          <a:blip r:embed="rId3"/>
+          <a:stretch>
+            <a:fillRect/>
+          </a:stretch>
+        </p:blipFill>
+        <p:spPr>
+          <a:xfrm>
+            <a:off x="6085405" y="5219046"/>
+            <a:ext cx="10701680" cy="4382154"/>
+          </a:xfrm>
+          <a:prstGeom prst="rect">
+            <a:avLst/>
+          </a:prstGeom>
+        </p:spPr>
+      </p:pic>
     </p:spTree>
   </p:cSld>
   <p:clrMapOvr>
@@ -4187,7 +4283,7 @@
         <p:spPr>
           <a:xfrm>
             <a:off x="10194801" y="4545887"/>
-            <a:ext cx="5732780" cy="4075475"/>
+            <a:ext cx="5732780" cy="4444807"/>
           </a:xfrm>
           <a:prstGeom prst="rect">
             <a:avLst/>
@@ -4313,8 +4409,41 @@
               <a:rPr lang="ru-RU" sz="2400" dirty="0" smtClean="0">
                 <a:latin typeface="Trebuchet MS" panose="020B0603020202020204" pitchFamily="34" charset="0"/>
               </a:rPr>
-              <a:t>Сверстать страницы блоков и задач.</a:t>
-            </a:r>
+              <a:t>Сверстать страницы </a:t>
+            </a:r>
+            <a:r>
+              <a:rPr lang="ru-RU" sz="2400" dirty="0" smtClean="0">
+                <a:latin typeface="Trebuchet MS" panose="020B0603020202020204" pitchFamily="34" charset="0"/>
+              </a:rPr>
+              <a:t>главную страницу</a:t>
+            </a:r>
+            <a:r>
+              <a:rPr lang="ru-RU" sz="2400" dirty="0" smtClean="0">
+                <a:latin typeface="Trebuchet MS" panose="020B0603020202020204" pitchFamily="34" charset="0"/>
+              </a:rPr>
+              <a:t> </a:t>
+            </a:r>
+            <a:r>
+              <a:rPr lang="ru-RU" sz="2400" dirty="0" smtClean="0">
+                <a:latin typeface="Trebuchet MS" panose="020B0603020202020204" pitchFamily="34" charset="0"/>
+              </a:rPr>
+              <a:t>и </a:t>
+            </a:r>
+            <a:r>
+              <a:rPr lang="ru-RU" sz="2400" dirty="0" smtClean="0">
+                <a:latin typeface="Trebuchet MS" panose="020B0603020202020204" pitchFamily="34" charset="0"/>
+              </a:rPr>
+              <a:t>страницу с задачами</a:t>
+            </a:r>
+            <a:r>
+              <a:rPr lang="ru-RU" sz="2400" dirty="0" smtClean="0">
+                <a:latin typeface="Trebuchet MS" panose="020B0603020202020204" pitchFamily="34" charset="0"/>
+              </a:rPr>
+              <a:t>.</a:t>
+            </a:r>
+            <a:endParaRPr lang="ru-RU" sz="2400" dirty="0" smtClean="0">
+              <a:latin typeface="Trebuchet MS" panose="020B0603020202020204" pitchFamily="34" charset="0"/>
+            </a:endParaRPr>
           </a:p>
           <a:p>
             <a:pPr marL="514350" indent="-514350">

--- a/docs/Presentation.pptx
+++ b/docs/Presentation.pptx
@@ -126,7 +126,7 @@
           <a:p>
             <a:fld id="{19CA8FF3-C8A0-4F88-83DE-2F29BD7ABA81}" type="datetimeFigureOut">
               <a:rPr lang="ru-RU" smtClean="0"/>
-              <a:t>14.05.2026</a:t>
+              <a:t>15.05.2026</a:t>
             </a:fld>
             <a:endParaRPr lang="ru-RU"/>
           </a:p>
@@ -629,7 +629,7 @@
           <a:p>
             <a:fld id="{1D8BD707-D9CF-40AE-B4C6-C98DA3205C09}" type="datetimeFigureOut">
               <a:rPr lang="en-US"/>
-              <a:t>5/14/2026</a:t>
+              <a:t>5/15/2026</a:t>
             </a:fld>
             <a:endParaRPr lang="en-US"/>
           </a:p>
@@ -815,7 +815,7 @@
           <a:p>
             <a:fld id="{1D8BD707-D9CF-40AE-B4C6-C98DA3205C09}" type="datetimeFigureOut">
               <a:rPr lang="en-US"/>
-              <a:t>5/14/2026</a:t>
+              <a:t>5/15/2026</a:t>
             </a:fld>
             <a:endParaRPr lang="en-US"/>
           </a:p>
@@ -1038,7 +1038,7 @@
           <a:p>
             <a:fld id="{1D8BD707-D9CF-40AE-B4C6-C98DA3205C09}" type="datetimeFigureOut">
               <a:rPr lang="en-US"/>
-              <a:t>5/14/2026</a:t>
+              <a:t>5/15/2026</a:t>
             </a:fld>
             <a:endParaRPr lang="en-US"/>
           </a:p>
@@ -1920,7 +1920,7 @@
           <a:p>
             <a:fld id="{1D8BD707-D9CF-40AE-B4C6-C98DA3205C09}" type="datetimeFigureOut">
               <a:rPr lang="en-US"/>
-              <a:t>5/14/2026</a:t>
+              <a:t>5/15/2026</a:t>
             </a:fld>
             <a:endParaRPr lang="en-US"/>
           </a:p>
@@ -2048,7 +2048,7 @@
           <a:p>
             <a:fld id="{1D8BD707-D9CF-40AE-B4C6-C98DA3205C09}" type="datetimeFigureOut">
               <a:rPr lang="en-US"/>
-              <a:t>5/14/2026</a:t>
+              <a:t>5/15/2026</a:t>
             </a:fld>
             <a:endParaRPr lang="en-US"/>
           </a:p>
@@ -2282,7 +2282,7 @@
           <a:p>
             <a:fld id="{1D8BD707-D9CF-40AE-B4C6-C98DA3205C09}" type="datetimeFigureOut">
               <a:rPr lang="en-US"/>
-              <a:t>5/14/2026</a:t>
+              <a:t>5/15/2026</a:t>
             </a:fld>
             <a:endParaRPr lang="en-US"/>
           </a:p>
@@ -2634,13 +2634,7 @@
               <a:rPr lang="en-US" sz="4800" dirty="0" smtClean="0">
                 <a:latin typeface="Trebuchet MS" panose="020B0603020202020204" pitchFamily="34" charset="0"/>
               </a:rPr>
-              <a:t> </a:t>
-            </a:r>
-            <a:r>
-              <a:rPr lang="en-US" sz="4800" dirty="0" smtClean="0">
-                <a:latin typeface="Trebuchet MS" panose="020B0603020202020204" pitchFamily="34" charset="0"/>
-              </a:rPr>
-              <a:t>LMS</a:t>
+              <a:t> LMS</a:t>
             </a:r>
             <a:endParaRPr lang="ru-RU" sz="4800" dirty="0">
               <a:latin typeface="Trebuchet MS" panose="020B0603020202020204" pitchFamily="34" charset="0"/>
@@ -3053,8 +3047,11 @@
                 </a:solidFill>
                 <a:latin typeface="Trebuchet MS" panose="020B0603020202020204" pitchFamily="34" charset="0"/>
               </a:rPr>
-              <a:t>Цель и задачи </a:t>
-            </a:r>
+              <a:t>Цель и задачи проекта</a:t>
+            </a:r>
+          </a:p>
+          <a:p>
+            <a:pPr marL="457200" indent="-457200"/>
             <a:r>
               <a:rPr lang="ru-RU" altLang="ru-RU" sz="3500" dirty="0" smtClean="0">
                 <a:solidFill>
@@ -3062,11 +3059,8 @@
                 </a:solidFill>
                 <a:latin typeface="Trebuchet MS" panose="020B0603020202020204" pitchFamily="34" charset="0"/>
               </a:rPr>
-              <a:t>проекта</a:t>
-            </a:r>
-          </a:p>
-          <a:p>
-            <a:pPr marL="457200" indent="-457200"/>
+              <a:t>3) Просмотр </a:t>
+            </a:r>
             <a:r>
               <a:rPr lang="ru-RU" altLang="ru-RU" sz="3500" dirty="0" smtClean="0">
                 <a:solidFill>
@@ -3074,7 +3068,25 @@
                 </a:solidFill>
                 <a:latin typeface="Trebuchet MS" panose="020B0603020202020204" pitchFamily="34" charset="0"/>
               </a:rPr>
-              <a:t>3) Просмотр интерфейса</a:t>
+              <a:t>фронта</a:t>
+            </a:r>
+            <a:r>
+              <a:rPr lang="en-US" altLang="ru-RU" sz="3500" dirty="0" smtClean="0">
+                <a:solidFill>
+                  <a:schemeClr val="tx1"/>
+                </a:solidFill>
+                <a:latin typeface="Trebuchet MS" panose="020B0603020202020204" pitchFamily="34" charset="0"/>
+              </a:rPr>
+              <a:t>/</a:t>
+            </a:r>
+            <a:r>
+              <a:rPr lang="ru-RU" altLang="ru-RU" sz="3500" dirty="0" err="1" smtClean="0">
+                <a:solidFill>
+                  <a:schemeClr val="tx1"/>
+                </a:solidFill>
+                <a:latin typeface="Trebuchet MS" panose="020B0603020202020204" pitchFamily="34" charset="0"/>
+              </a:rPr>
+              <a:t>бэка</a:t>
             </a:r>
             <a:endParaRPr lang="en-US" altLang="ru-RU" sz="3500" dirty="0" smtClean="0">
               <a:solidFill>
@@ -3882,19 +3894,7 @@
               <a:rPr lang="ru-RU" sz="2400" dirty="0" smtClean="0">
                 <a:latin typeface="Trebuchet MS" panose="020B0603020202020204" pitchFamily="34" charset="0"/>
               </a:rPr>
-              <a:t>Сейчас </a:t>
-            </a:r>
-            <a:r>
-              <a:rPr lang="ru-RU" sz="2400" dirty="0" smtClean="0">
-                <a:latin typeface="Trebuchet MS" panose="020B0603020202020204" pitchFamily="34" charset="0"/>
-              </a:rPr>
-              <a:t>многие онлайн-курсы учат слишком долго: сначала нужно посмотреть несколько часов лекций, потом прочитать теорию, и только потом — пара простых заданий. Новички, школьники и студенты теряют мотивацию, потому что нет быстрого результата</a:t>
-            </a:r>
-            <a:r>
-              <a:rPr lang="ru-RU" sz="2400" dirty="0" smtClean="0">
-                <a:latin typeface="Trebuchet MS" panose="020B0603020202020204" pitchFamily="34" charset="0"/>
-              </a:rPr>
-              <a:t>.</a:t>
+              <a:t>Сейчас многие онлайн-курсы учат слишком долго: сначала нужно посмотреть несколько часов лекций, потом прочитать теорию, и только потом — пара простых заданий. Новички, школьники и студенты теряют мотивацию, потому что нет быстрого результата.</a:t>
             </a:r>
             <a:endParaRPr lang="ru-RU" sz="2400" dirty="0">
               <a:latin typeface="Trebuchet MS" panose="020B0603020202020204" pitchFamily="34" charset="0"/>
@@ -3916,13 +3916,7 @@
               <a:rPr lang="ru-RU" sz="2400" dirty="0" smtClean="0">
                 <a:latin typeface="Trebuchet MS" panose="020B0603020202020204" pitchFamily="34" charset="0"/>
               </a:rPr>
-              <a:t>Особенно это </a:t>
-            </a:r>
-            <a:r>
-              <a:rPr lang="ru-RU" sz="2400" dirty="0" smtClean="0">
-                <a:latin typeface="Trebuchet MS" panose="020B0603020202020204" pitchFamily="34" charset="0"/>
-              </a:rPr>
-              <a:t>чувствуется при подготовке к олимпиадам по промышленному  программированию (например, Высшая проба</a:t>
+              <a:t>Особенно это чувствуется при подготовке к олимпиадам по промышленному  программированию (например, Высшая проба</a:t>
             </a:r>
             <a:r>
               <a:rPr lang="en-US" sz="2400" dirty="0" smtClean="0">
@@ -3934,19 +3928,7 @@
               <a:rPr lang="ru-RU" sz="2400" dirty="0" smtClean="0">
                 <a:latin typeface="Trebuchet MS" panose="020B0603020202020204" pitchFamily="34" charset="0"/>
               </a:rPr>
-              <a:t>). Там нужны не знания лекций, а навык решения конкретных задач. </a:t>
-            </a:r>
-            <a:r>
-              <a:rPr lang="ru-RU" sz="2400" dirty="0" smtClean="0">
-                <a:latin typeface="Trebuchet MS" panose="020B0603020202020204" pitchFamily="34" charset="0"/>
-              </a:rPr>
-              <a:t>LMS </a:t>
-            </a:r>
-            <a:r>
-              <a:rPr lang="ru-RU" sz="2400" dirty="0" smtClean="0">
-                <a:latin typeface="Trebuchet MS" panose="020B0603020202020204" pitchFamily="34" charset="0"/>
-              </a:rPr>
-              <a:t>меняет подход: меньше слов — сразу практика. Это идеально подходит тем, кто хочет «набить руку».</a:t>
+              <a:t>). Там нужны не знания лекций, а навык решения конкретных задач. LMS меняет подход: меньше слов — сразу практика. Это идеально подходит тем, кто хочет «набить руку».</a:t>
             </a:r>
             <a:endParaRPr lang="ru-RU" sz="2400" dirty="0">
               <a:latin typeface="Trebuchet MS" panose="020B0603020202020204" pitchFamily="34" charset="0"/>
@@ -4015,7 +3997,7 @@
       </p:sp>
       <p:pic>
         <p:nvPicPr>
-          <p:cNvPr id="9" name="Рисунок 8"/>
+          <p:cNvPr id="10" name="Рисунок 9"/>
           <p:cNvPicPr>
             <a:picLocks noChangeAspect="1"/>
           </p:cNvPicPr>
@@ -4029,8 +4011,8 @@
         </p:blipFill>
         <p:spPr>
           <a:xfrm>
-            <a:off x="6085405" y="5219046"/>
-            <a:ext cx="10701680" cy="4382154"/>
+            <a:off x="6183629" y="5219046"/>
+            <a:ext cx="10673843" cy="4371795"/>
           </a:xfrm>
           <a:prstGeom prst="rect">
             <a:avLst/>
@@ -4409,41 +4391,8 @@
               <a:rPr lang="ru-RU" sz="2400" dirty="0" smtClean="0">
                 <a:latin typeface="Trebuchet MS" panose="020B0603020202020204" pitchFamily="34" charset="0"/>
               </a:rPr>
-              <a:t>Сверстать страницы </a:t>
-            </a:r>
-            <a:r>
-              <a:rPr lang="ru-RU" sz="2400" dirty="0" smtClean="0">
-                <a:latin typeface="Trebuchet MS" panose="020B0603020202020204" pitchFamily="34" charset="0"/>
-              </a:rPr>
-              <a:t>главную страницу</a:t>
-            </a:r>
-            <a:r>
-              <a:rPr lang="ru-RU" sz="2400" dirty="0" smtClean="0">
-                <a:latin typeface="Trebuchet MS" panose="020B0603020202020204" pitchFamily="34" charset="0"/>
-              </a:rPr>
-              <a:t> </a:t>
-            </a:r>
-            <a:r>
-              <a:rPr lang="ru-RU" sz="2400" dirty="0" smtClean="0">
-                <a:latin typeface="Trebuchet MS" panose="020B0603020202020204" pitchFamily="34" charset="0"/>
-              </a:rPr>
-              <a:t>и </a:t>
-            </a:r>
-            <a:r>
-              <a:rPr lang="ru-RU" sz="2400" dirty="0" smtClean="0">
-                <a:latin typeface="Trebuchet MS" panose="020B0603020202020204" pitchFamily="34" charset="0"/>
-              </a:rPr>
-              <a:t>страницу с задачами</a:t>
-            </a:r>
-            <a:r>
-              <a:rPr lang="ru-RU" sz="2400" dirty="0" smtClean="0">
-                <a:latin typeface="Trebuchet MS" panose="020B0603020202020204" pitchFamily="34" charset="0"/>
-              </a:rPr>
-              <a:t>.</a:t>
-            </a:r>
-            <a:endParaRPr lang="ru-RU" sz="2400" dirty="0" smtClean="0">
-              <a:latin typeface="Trebuchet MS" panose="020B0603020202020204" pitchFamily="34" charset="0"/>
-            </a:endParaRPr>
+              <a:t>Сверстать страницы главную страницу и страницу с задачами.</a:t>
+            </a:r>
           </a:p>
           <a:p>
             <a:pPr marL="514350" indent="-514350">
@@ -5898,7 +5847,7 @@
       </p:sp>
       <p:pic>
         <p:nvPicPr>
-          <p:cNvPr id="7" name="Рисунок 6"/>
+          <p:cNvPr id="8" name="Рисунок 7"/>
           <p:cNvPicPr>
             <a:picLocks noChangeAspect="1"/>
           </p:cNvPicPr>
@@ -5918,8 +5867,8 @@
         </p:blipFill>
         <p:spPr>
           <a:xfrm>
-            <a:off x="8667750" y="5181600"/>
-            <a:ext cx="8536571" cy="4424498"/>
+            <a:off x="139060" y="1207631"/>
+            <a:ext cx="8300090" cy="4292842"/>
           </a:xfrm>
           <a:prstGeom prst="rect">
             <a:avLst/>
@@ -5928,28 +5877,22 @@
       </p:pic>
       <p:pic>
         <p:nvPicPr>
-          <p:cNvPr id="8" name="Рисунок 7"/>
+          <p:cNvPr id="4" name="Рисунок 3"/>
           <p:cNvPicPr>
             <a:picLocks noChangeAspect="1"/>
           </p:cNvPicPr>
           <p:nvPr/>
         </p:nvPicPr>
         <p:blipFill>
-          <a:blip r:embed="rId4">
-            <a:extLst>
-              <a:ext uri="{28A0092B-C50C-407E-A947-70E740481C1C}">
-                <a14:useLocalDpi xmlns:a14="http://schemas.microsoft.com/office/drawing/2010/main" val="0"/>
-              </a:ext>
-            </a:extLst>
-          </a:blip>
+          <a:blip r:embed="rId4"/>
           <a:stretch>
             <a:fillRect/>
           </a:stretch>
         </p:blipFill>
         <p:spPr>
           <a:xfrm>
-            <a:off x="139060" y="1207631"/>
-            <a:ext cx="8300090" cy="4292842"/>
+            <a:off x="8651365" y="5266797"/>
+            <a:ext cx="8684135" cy="4486803"/>
           </a:xfrm>
           <a:prstGeom prst="rect">
             <a:avLst/>
@@ -5998,8 +5941,8 @@
         </p:nvSpPr>
         <p:spPr>
           <a:xfrm>
-            <a:off x="634419" y="389613"/>
-            <a:ext cx="5975932" cy="665480"/>
+            <a:off x="634418" y="389613"/>
+            <a:ext cx="8490532" cy="905787"/>
           </a:xfrm>
         </p:spPr>
         <p:txBody>
@@ -6007,8 +5950,28 @@
           <a:lstStyle/>
           <a:p>
             <a:r>
-              <a:rPr lang="ru-RU" smtClean="0"/>
-              <a:t>Интерфейс игры</a:t>
+              <a:rPr lang="ru-RU" dirty="0" err="1" smtClean="0"/>
+              <a:t>Фронтенд</a:t>
+            </a:r>
+            <a:r>
+              <a:rPr lang="ru-RU" dirty="0" smtClean="0"/>
+              <a:t> сайта</a:t>
+            </a:r>
+            <a:r>
+              <a:rPr lang="ru-RU" dirty="0"/>
+              <a:t> </a:t>
+            </a:r>
+            <a:r>
+              <a:rPr lang="ru-RU" dirty="0" smtClean="0"/>
+              <a:t>и структура </a:t>
+            </a:r>
+            <a:r>
+              <a:rPr lang="ru-RU" dirty="0" err="1" smtClean="0"/>
+              <a:t>бэка</a:t>
+            </a:r>
+            <a:r>
+              <a:rPr lang="ru-RU" dirty="0" smtClean="0"/>
+              <a:t> </a:t>
             </a:r>
             <a:endParaRPr lang="ru-RU" dirty="0"/>
           </a:p>
@@ -6076,7 +6039,7 @@
       </p:sp>
       <p:pic>
         <p:nvPicPr>
-          <p:cNvPr id="4" name="Рисунок 3"/>
+          <p:cNvPr id="6" name="Рисунок 5"/>
           <p:cNvPicPr>
             <a:picLocks noChangeAspect="1"/>
           </p:cNvPicPr>
@@ -6096,8 +6059,8 @@
         </p:blipFill>
         <p:spPr>
           <a:xfrm>
-            <a:off x="133350" y="1202412"/>
-            <a:ext cx="8305800" cy="4293789"/>
+            <a:off x="8645525" y="1202412"/>
+            <a:ext cx="8678482" cy="4295955"/>
           </a:xfrm>
           <a:prstGeom prst="rect">
             <a:avLst/>
@@ -6106,28 +6069,46 @@
       </p:pic>
       <p:pic>
         <p:nvPicPr>
-          <p:cNvPr id="6" name="Рисунок 5"/>
+          <p:cNvPr id="7" name="Рисунок 6"/>
           <p:cNvPicPr>
             <a:picLocks noChangeAspect="1"/>
           </p:cNvPicPr>
           <p:nvPr/>
         </p:nvPicPr>
         <p:blipFill>
-          <a:blip r:embed="rId4">
-            <a:extLst>
-              <a:ext uri="{28A0092B-C50C-407E-A947-70E740481C1C}">
-                <a14:useLocalDpi xmlns:a14="http://schemas.microsoft.com/office/drawing/2010/main" val="0"/>
-              </a:ext>
-            </a:extLst>
-          </a:blip>
+          <a:blip r:embed="rId4"/>
           <a:stretch>
             <a:fillRect/>
           </a:stretch>
         </p:blipFill>
         <p:spPr>
           <a:xfrm>
-            <a:off x="8654670" y="5257800"/>
-            <a:ext cx="8678482" cy="4495800"/>
+            <a:off x="121331" y="1202412"/>
+            <a:ext cx="8301038" cy="4295955"/>
+          </a:xfrm>
+          <a:prstGeom prst="rect">
+            <a:avLst/>
+          </a:prstGeom>
+        </p:spPr>
+      </p:pic>
+      <p:pic>
+        <p:nvPicPr>
+          <p:cNvPr id="8" name="Рисунок 7"/>
+          <p:cNvPicPr>
+            <a:picLocks noChangeAspect="1"/>
+          </p:cNvPicPr>
+          <p:nvPr/>
+        </p:nvPicPr>
+        <p:blipFill>
+          <a:blip r:embed="rId5"/>
+          <a:stretch>
+            <a:fillRect/>
+          </a:stretch>
+        </p:blipFill>
+        <p:spPr>
+          <a:xfrm>
+            <a:off x="4022777" y="5638800"/>
+            <a:ext cx="8799184" cy="3962400"/>
           </a:xfrm>
           <a:prstGeom prst="rect">
             <a:avLst/>

--- a/docs/Presentation.pptx
+++ b/docs/Presentation.pptx
@@ -5,7 +5,7 @@
     <p:sldMasterId id="2147483648" r:id="rId1"/>
   </p:sldMasterIdLst>
   <p:notesMasterIdLst>
-    <p:notesMasterId r:id="rId11"/>
+    <p:notesMasterId r:id="rId10"/>
   </p:notesMasterIdLst>
   <p:sldIdLst>
     <p:sldId id="256" r:id="rId2"/>
@@ -13,10 +13,9 @@
     <p:sldId id="257" r:id="rId4"/>
     <p:sldId id="260" r:id="rId5"/>
     <p:sldId id="276" r:id="rId6"/>
-    <p:sldId id="277" r:id="rId7"/>
-    <p:sldId id="278" r:id="rId8"/>
-    <p:sldId id="264" r:id="rId9"/>
-    <p:sldId id="272" r:id="rId10"/>
+    <p:sldId id="278" r:id="rId7"/>
+    <p:sldId id="264" r:id="rId8"/>
+    <p:sldId id="272" r:id="rId9"/>
   </p:sldIdLst>
   <p:sldSz cx="17335500" cy="9753600"/>
   <p:notesSz cx="17335500" cy="9753600"/>
@@ -126,7 +125,7 @@
           <a:p>
             <a:fld id="{19CA8FF3-C8A0-4F88-83DE-2F29BD7ABA81}" type="datetimeFigureOut">
               <a:rPr lang="ru-RU" smtClean="0"/>
-              <a:t>15.05.2026</a:t>
+              <a:t>22.05.2026</a:t>
             </a:fld>
             <a:endParaRPr lang="ru-RU"/>
           </a:p>
@@ -459,7 +458,7 @@
           <a:p>
             <a:fld id="{EEE91D91-7361-4C4B-9E79-AE19565AD029}" type="slidenum">
               <a:rPr lang="ru-RU" smtClean="0"/>
-              <a:t>9</a:t>
+              <a:t>8</a:t>
             </a:fld>
             <a:endParaRPr lang="ru-RU"/>
           </a:p>
@@ -629,7 +628,7 @@
           <a:p>
             <a:fld id="{1D8BD707-D9CF-40AE-B4C6-C98DA3205C09}" type="datetimeFigureOut">
               <a:rPr lang="en-US"/>
-              <a:t>5/15/2026</a:t>
+              <a:t>5/22/2026</a:t>
             </a:fld>
             <a:endParaRPr lang="en-US"/>
           </a:p>
@@ -815,7 +814,7 @@
           <a:p>
             <a:fld id="{1D8BD707-D9CF-40AE-B4C6-C98DA3205C09}" type="datetimeFigureOut">
               <a:rPr lang="en-US"/>
-              <a:t>5/15/2026</a:t>
+              <a:t>5/22/2026</a:t>
             </a:fld>
             <a:endParaRPr lang="en-US"/>
           </a:p>
@@ -1038,7 +1037,7 @@
           <a:p>
             <a:fld id="{1D8BD707-D9CF-40AE-B4C6-C98DA3205C09}" type="datetimeFigureOut">
               <a:rPr lang="en-US"/>
-              <a:t>5/15/2026</a:t>
+              <a:t>5/22/2026</a:t>
             </a:fld>
             <a:endParaRPr lang="en-US"/>
           </a:p>
@@ -1920,7 +1919,7 @@
           <a:p>
             <a:fld id="{1D8BD707-D9CF-40AE-B4C6-C98DA3205C09}" type="datetimeFigureOut">
               <a:rPr lang="en-US"/>
-              <a:t>5/15/2026</a:t>
+              <a:t>5/22/2026</a:t>
             </a:fld>
             <a:endParaRPr lang="en-US"/>
           </a:p>
@@ -2048,7 +2047,7 @@
           <a:p>
             <a:fld id="{1D8BD707-D9CF-40AE-B4C6-C98DA3205C09}" type="datetimeFigureOut">
               <a:rPr lang="en-US"/>
-              <a:t>5/15/2026</a:t>
+              <a:t>5/22/2026</a:t>
             </a:fld>
             <a:endParaRPr lang="en-US"/>
           </a:p>
@@ -2282,7 +2281,7 @@
           <a:p>
             <a:fld id="{1D8BD707-D9CF-40AE-B4C6-C98DA3205C09}" type="datetimeFigureOut">
               <a:rPr lang="en-US"/>
-              <a:t>5/15/2026</a:t>
+              <a:t>5/22/2026</a:t>
             </a:fld>
             <a:endParaRPr lang="en-US"/>
           </a:p>
@@ -3047,7 +3046,16 @@
                 </a:solidFill>
                 <a:latin typeface="Trebuchet MS" panose="020B0603020202020204" pitchFamily="34" charset="0"/>
               </a:rPr>
-              <a:t>Цель и задачи проекта</a:t>
+              <a:t>Цель и задачи </a:t>
+            </a:r>
+            <a:r>
+              <a:rPr lang="ru-RU" altLang="ru-RU" sz="3500" dirty="0" smtClean="0">
+                <a:solidFill>
+                  <a:schemeClr val="tx1"/>
+                </a:solidFill>
+                <a:latin typeface="Trebuchet MS" panose="020B0603020202020204" pitchFamily="34" charset="0"/>
+              </a:rPr>
+              <a:t>проекта</a:t>
             </a:r>
           </a:p>
           <a:p>
@@ -3062,33 +3070,24 @@
               <a:t>3) Просмотр </a:t>
             </a:r>
             <a:r>
+              <a:rPr lang="ru-RU" altLang="ru-RU" sz="3500" dirty="0" err="1" smtClean="0">
+                <a:solidFill>
+                  <a:schemeClr val="tx1"/>
+                </a:solidFill>
+                <a:latin typeface="Trebuchet MS" panose="020B0603020202020204" pitchFamily="34" charset="0"/>
+              </a:rPr>
+              <a:t>стэка</a:t>
+            </a:r>
+            <a:r>
               <a:rPr lang="ru-RU" altLang="ru-RU" sz="3500" dirty="0" smtClean="0">
                 <a:solidFill>
                   <a:schemeClr val="tx1"/>
                 </a:solidFill>
                 <a:latin typeface="Trebuchet MS" panose="020B0603020202020204" pitchFamily="34" charset="0"/>
               </a:rPr>
-              <a:t>фронта</a:t>
-            </a:r>
-            <a:r>
-              <a:rPr lang="en-US" altLang="ru-RU" sz="3500" dirty="0" smtClean="0">
-                <a:solidFill>
-                  <a:schemeClr val="tx1"/>
-                </a:solidFill>
-                <a:latin typeface="Trebuchet MS" panose="020B0603020202020204" pitchFamily="34" charset="0"/>
-              </a:rPr>
-              <a:t>/</a:t>
-            </a:r>
-            <a:r>
-              <a:rPr lang="ru-RU" altLang="ru-RU" sz="3500" dirty="0" err="1" smtClean="0">
-                <a:solidFill>
-                  <a:schemeClr val="tx1"/>
-                </a:solidFill>
-                <a:latin typeface="Trebuchet MS" panose="020B0603020202020204" pitchFamily="34" charset="0"/>
-              </a:rPr>
-              <a:t>бэка</a:t>
-            </a:r>
-            <a:endParaRPr lang="en-US" altLang="ru-RU" sz="3500" dirty="0" smtClean="0">
+              <a:t> технологий</a:t>
+            </a:r>
+            <a:endParaRPr lang="ru-RU" altLang="ru-RU" sz="3500" dirty="0" smtClean="0">
               <a:solidFill>
                 <a:schemeClr val="tx1"/>
               </a:solidFill>
@@ -3107,13 +3106,49 @@
               <a:t>4</a:t>
             </a:r>
             <a:r>
+              <a:rPr lang="ru-RU" altLang="ru-RU" sz="3500" dirty="0" smtClean="0">
+                <a:solidFill>
+                  <a:schemeClr val="tx1"/>
+                </a:solidFill>
+                <a:latin typeface="Trebuchet MS" panose="020B0603020202020204" pitchFamily="34" charset="0"/>
+              </a:rPr>
+              <a:t>) Структура </a:t>
+            </a:r>
+            <a:r>
+              <a:rPr lang="ru-RU" altLang="ru-RU" sz="3500" dirty="0" err="1" smtClean="0">
+                <a:solidFill>
+                  <a:schemeClr val="tx1"/>
+                </a:solidFill>
+                <a:latin typeface="Trebuchet MS" panose="020B0603020202020204" pitchFamily="34" charset="0"/>
+              </a:rPr>
+              <a:t>бэкенда</a:t>
+            </a:r>
+            <a:r>
+              <a:rPr lang="ru-RU" altLang="ru-RU" sz="3500" dirty="0" smtClean="0">
+                <a:solidFill>
+                  <a:schemeClr val="tx1"/>
+                </a:solidFill>
+                <a:latin typeface="Trebuchet MS" panose="020B0603020202020204" pitchFamily="34" charset="0"/>
+              </a:rPr>
+              <a:t> и оценка проекта</a:t>
+            </a:r>
+            <a:endParaRPr lang="en-US" altLang="ru-RU" sz="3500" dirty="0" smtClean="0">
+              <a:solidFill>
+                <a:schemeClr val="tx1"/>
+              </a:solidFill>
+              <a:latin typeface="Trebuchet MS" panose="020B0603020202020204" pitchFamily="34" charset="0"/>
+            </a:endParaRPr>
+          </a:p>
+          <a:p>
+            <a:pPr marL="457200" indent="-457200"/>
+            <a:r>
               <a:rPr lang="en-US" altLang="ru-RU" sz="3500" dirty="0" smtClean="0">
                 <a:solidFill>
                   <a:schemeClr val="tx1"/>
                 </a:solidFill>
                 <a:latin typeface="Trebuchet MS" panose="020B0603020202020204" pitchFamily="34" charset="0"/>
               </a:rPr>
-              <a:t>) </a:t>
+              <a:t>5) </a:t>
             </a:r>
             <a:r>
               <a:rPr lang="ru-RU" altLang="ru-RU" sz="3500" dirty="0" smtClean="0">
@@ -5765,8 +5800,8 @@
         </p:nvSpPr>
         <p:spPr>
           <a:xfrm>
-            <a:off x="634419" y="389613"/>
-            <a:ext cx="5975932" cy="665480"/>
+            <a:off x="634418" y="389613"/>
+            <a:ext cx="9404932" cy="1292662"/>
           </a:xfrm>
         </p:spPr>
         <p:txBody>
@@ -5774,204 +5809,16 @@
           <a:lstStyle/>
           <a:p>
             <a:r>
+              <a:rPr lang="ru-RU" dirty="0" smtClean="0"/>
+              <a:t>Структура </a:t>
+            </a:r>
+            <a:r>
               <a:rPr lang="ru-RU" dirty="0" err="1" smtClean="0"/>
-              <a:t>Фронтенд</a:t>
+              <a:t>бэкенда</a:t>
             </a:r>
             <a:r>
               <a:rPr lang="ru-RU" dirty="0" smtClean="0"/>
-              <a:t> сайта</a:t>
-            </a:r>
-            <a:endParaRPr lang="ru-RU" dirty="0"/>
-          </a:p>
-        </p:txBody>
-      </p:sp>
-      <p:pic>
-        <p:nvPicPr>
-          <p:cNvPr id="3" name="object 4"/>
-          <p:cNvPicPr/>
-          <p:nvPr/>
-        </p:nvPicPr>
-        <p:blipFill>
-          <a:blip r:embed="rId2" cstate="print"/>
-          <a:stretch>
-            <a:fillRect/>
-          </a:stretch>
-        </p:blipFill>
-        <p:spPr>
-          <a:xfrm>
-            <a:off x="13629351" y="242293"/>
-            <a:ext cx="2729483" cy="960119"/>
-          </a:xfrm>
-          <a:prstGeom prst="rect">
-            <a:avLst/>
-          </a:prstGeom>
-        </p:spPr>
-      </p:pic>
-      <p:sp>
-        <p:nvSpPr>
-          <p:cNvPr id="5" name="Заголовок 1"/>
-          <p:cNvSpPr txBox="1">
-            <a:spLocks/>
-          </p:cNvSpPr>
-          <p:nvPr/>
-        </p:nvSpPr>
-        <p:spPr>
-          <a:xfrm>
-            <a:off x="1276350" y="2057400"/>
-            <a:ext cx="5975932" cy="665480"/>
-          </a:xfrm>
-          <a:prstGeom prst="rect">
-            <a:avLst/>
-          </a:prstGeom>
-        </p:spPr>
-        <p:txBody>
-          <a:bodyPr wrap="square" lIns="0" tIns="0" rIns="0" bIns="0">
-            <a:spAutoFit/>
-          </a:bodyPr>
-          <a:lstStyle>
-            <a:lvl1pPr>
-              <a:defRPr sz="4200" b="0" i="0">
-                <a:solidFill>
-                  <a:schemeClr val="tx1"/>
-                </a:solidFill>
-                <a:latin typeface="Trebuchet MS"/>
-                <a:ea typeface="+mj-ea"/>
-                <a:cs typeface="Trebuchet MS"/>
-              </a:defRPr>
-            </a:lvl1pPr>
-          </a:lstStyle>
-          <a:p>
-            <a:endParaRPr lang="ru-RU" dirty="0"/>
-          </a:p>
-        </p:txBody>
-      </p:sp>
-      <p:pic>
-        <p:nvPicPr>
-          <p:cNvPr id="8" name="Рисунок 7"/>
-          <p:cNvPicPr>
-            <a:picLocks noChangeAspect="1"/>
-          </p:cNvPicPr>
-          <p:nvPr/>
-        </p:nvPicPr>
-        <p:blipFill>
-          <a:blip r:embed="rId3">
-            <a:extLst>
-              <a:ext uri="{28A0092B-C50C-407E-A947-70E740481C1C}">
-                <a14:useLocalDpi xmlns:a14="http://schemas.microsoft.com/office/drawing/2010/main" val="0"/>
-              </a:ext>
-            </a:extLst>
-          </a:blip>
-          <a:stretch>
-            <a:fillRect/>
-          </a:stretch>
-        </p:blipFill>
-        <p:spPr>
-          <a:xfrm>
-            <a:off x="139060" y="1207631"/>
-            <a:ext cx="8300090" cy="4292842"/>
-          </a:xfrm>
-          <a:prstGeom prst="rect">
-            <a:avLst/>
-          </a:prstGeom>
-        </p:spPr>
-      </p:pic>
-      <p:pic>
-        <p:nvPicPr>
-          <p:cNvPr id="4" name="Рисунок 3"/>
-          <p:cNvPicPr>
-            <a:picLocks noChangeAspect="1"/>
-          </p:cNvPicPr>
-          <p:nvPr/>
-        </p:nvPicPr>
-        <p:blipFill>
-          <a:blip r:embed="rId4"/>
-          <a:stretch>
-            <a:fillRect/>
-          </a:stretch>
-        </p:blipFill>
-        <p:spPr>
-          <a:xfrm>
-            <a:off x="8651365" y="5266797"/>
-            <a:ext cx="8684135" cy="4486803"/>
-          </a:xfrm>
-          <a:prstGeom prst="rect">
-            <a:avLst/>
-          </a:prstGeom>
-        </p:spPr>
-      </p:pic>
-    </p:spTree>
-    <p:extLst>
-      <p:ext uri="{BB962C8B-B14F-4D97-AF65-F5344CB8AC3E}">
-        <p14:creationId xmlns:p14="http://schemas.microsoft.com/office/powerpoint/2010/main" val="4002432611"/>
-      </p:ext>
-    </p:extLst>
-  </p:cSld>
-  <p:clrMapOvr>
-    <a:masterClrMapping/>
-  </p:clrMapOvr>
-</p:sld>
-</file>
-
-<file path=ppt/slides/slide7.xml><?xml version="1.0" encoding="utf-8"?>
-<p:sld xmlns:a="http://schemas.openxmlformats.org/drawingml/2006/main" xmlns:r="http://schemas.openxmlformats.org/officeDocument/2006/relationships" xmlns:p="http://schemas.openxmlformats.org/presentationml/2006/main">
-  <p:cSld>
-    <p:spTree>
-      <p:nvGrpSpPr>
-        <p:cNvPr id="1" name=""/>
-        <p:cNvGrpSpPr/>
-        <p:nvPr/>
-      </p:nvGrpSpPr>
-      <p:grpSpPr>
-        <a:xfrm>
-          <a:off x="0" y="0"/>
-          <a:ext cx="0" cy="0"/>
-          <a:chOff x="0" y="0"/>
-          <a:chExt cx="0" cy="0"/>
-        </a:xfrm>
-      </p:grpSpPr>
-      <p:sp>
-        <p:nvSpPr>
-          <p:cNvPr id="2" name="Заголовок 1"/>
-          <p:cNvSpPr>
-            <a:spLocks noGrp="1"/>
-          </p:cNvSpPr>
-          <p:nvPr>
-            <p:ph type="title"/>
-          </p:nvPr>
-        </p:nvSpPr>
-        <p:spPr>
-          <a:xfrm>
-            <a:off x="634418" y="389613"/>
-            <a:ext cx="8490532" cy="905787"/>
-          </a:xfrm>
-        </p:spPr>
-        <p:txBody>
-          <a:bodyPr/>
-          <a:lstStyle/>
-          <a:p>
-            <a:r>
-              <a:rPr lang="ru-RU" dirty="0" err="1" smtClean="0"/>
-              <a:t>Фронтенд</a:t>
-            </a:r>
-            <a:r>
-              <a:rPr lang="ru-RU" dirty="0" smtClean="0"/>
-              <a:t> сайта</a:t>
-            </a:r>
-            <a:r>
-              <a:rPr lang="ru-RU" dirty="0"/>
-              <a:t> </a:t>
-            </a:r>
-            <a:r>
-              <a:rPr lang="ru-RU" dirty="0" smtClean="0"/>
-              <a:t>и структура </a:t>
-            </a:r>
-            <a:r>
-              <a:rPr lang="ru-RU" dirty="0" err="1" smtClean="0"/>
-              <a:t>бэка</a:t>
-            </a:r>
-            <a:r>
-              <a:rPr lang="ru-RU" dirty="0" smtClean="0"/>
-              <a:t> </a:t>
+              <a:t> и оценка проекта </a:t>
             </a:r>
             <a:endParaRPr lang="ru-RU" dirty="0"/>
           </a:p>
@@ -6039,14 +5886,38 @@
       </p:sp>
       <p:pic>
         <p:nvPicPr>
-          <p:cNvPr id="6" name="Рисунок 5"/>
+          <p:cNvPr id="8" name="Рисунок 7"/>
           <p:cNvPicPr>
             <a:picLocks noChangeAspect="1"/>
           </p:cNvPicPr>
           <p:nvPr/>
         </p:nvPicPr>
         <p:blipFill>
-          <a:blip r:embed="rId3">
+          <a:blip r:embed="rId3"/>
+          <a:stretch>
+            <a:fillRect/>
+          </a:stretch>
+        </p:blipFill>
+        <p:spPr>
+          <a:xfrm>
+            <a:off x="34738" y="2777010"/>
+            <a:ext cx="8515350" cy="3962400"/>
+          </a:xfrm>
+          <a:prstGeom prst="rect">
+            <a:avLst/>
+          </a:prstGeom>
+        </p:spPr>
+      </p:pic>
+      <p:pic>
+        <p:nvPicPr>
+          <p:cNvPr id="4" name="Рисунок 3"/>
+          <p:cNvPicPr>
+            <a:picLocks noChangeAspect="1"/>
+          </p:cNvPicPr>
+          <p:nvPr/>
+        </p:nvPicPr>
+        <p:blipFill>
+          <a:blip r:embed="rId4">
             <a:extLst>
               <a:ext uri="{28A0092B-C50C-407E-A947-70E740481C1C}">
                 <a14:useLocalDpi xmlns:a14="http://schemas.microsoft.com/office/drawing/2010/main" val="0"/>
@@ -6059,56 +5930,8 @@
         </p:blipFill>
         <p:spPr>
           <a:xfrm>
-            <a:off x="8645525" y="1202412"/>
-            <a:ext cx="8678482" cy="4295955"/>
-          </a:xfrm>
-          <a:prstGeom prst="rect">
-            <a:avLst/>
-          </a:prstGeom>
-        </p:spPr>
-      </p:pic>
-      <p:pic>
-        <p:nvPicPr>
-          <p:cNvPr id="7" name="Рисунок 6"/>
-          <p:cNvPicPr>
-            <a:picLocks noChangeAspect="1"/>
-          </p:cNvPicPr>
-          <p:nvPr/>
-        </p:nvPicPr>
-        <p:blipFill>
-          <a:blip r:embed="rId4"/>
-          <a:stretch>
-            <a:fillRect/>
-          </a:stretch>
-        </p:blipFill>
-        <p:spPr>
-          <a:xfrm>
-            <a:off x="121331" y="1202412"/>
-            <a:ext cx="8301038" cy="4295955"/>
-          </a:xfrm>
-          <a:prstGeom prst="rect">
-            <a:avLst/>
-          </a:prstGeom>
-        </p:spPr>
-      </p:pic>
-      <p:pic>
-        <p:nvPicPr>
-          <p:cNvPr id="8" name="Рисунок 7"/>
-          <p:cNvPicPr>
-            <a:picLocks noChangeAspect="1"/>
-          </p:cNvPicPr>
-          <p:nvPr/>
-        </p:nvPicPr>
-        <p:blipFill>
-          <a:blip r:embed="rId5"/>
-          <a:stretch>
-            <a:fillRect/>
-          </a:stretch>
-        </p:blipFill>
-        <p:spPr>
-          <a:xfrm>
-            <a:off x="4022777" y="5638800"/>
-            <a:ext cx="8799184" cy="3962400"/>
+            <a:off x="8699152" y="1202412"/>
+            <a:ext cx="8603851" cy="8392033"/>
           </a:xfrm>
           <a:prstGeom prst="rect">
             <a:avLst/>
@@ -6128,7 +5951,7 @@
 </p:sld>
 </file>
 
-<file path=ppt/slides/slide8.xml><?xml version="1.0" encoding="utf-8"?>
+<file path=ppt/slides/slide7.xml><?xml version="1.0" encoding="utf-8"?>
 <p:sld xmlns:a="http://schemas.openxmlformats.org/drawingml/2006/main" xmlns:r="http://schemas.openxmlformats.org/officeDocument/2006/relationships" xmlns:p="http://schemas.openxmlformats.org/presentationml/2006/main" showMasterSp="0">
   <p:cSld>
     <p:spTree>
@@ -7620,7 +7443,7 @@
             </a:pPr>
             <a:fld id="{81D60167-4931-47E6-BA6A-407CBD079E47}" type="slidenum">
               <a:rPr spc="-50" dirty="0"/>
-              <a:t>8</a:t>
+              <a:t>7</a:t>
             </a:fld>
             <a:endParaRPr spc="-50" dirty="0"/>
           </a:p>
@@ -7634,7 +7457,7 @@
 </p:sld>
 </file>
 
-<file path=ppt/slides/slide9.xml><?xml version="1.0" encoding="utf-8"?>
+<file path=ppt/slides/slide8.xml><?xml version="1.0" encoding="utf-8"?>
 <p:sld xmlns:a="http://schemas.openxmlformats.org/drawingml/2006/main" xmlns:r="http://schemas.openxmlformats.org/officeDocument/2006/relationships" xmlns:p="http://schemas.openxmlformats.org/presentationml/2006/main" showMasterSp="0">
   <p:cSld>
     <p:spTree>
@@ -9094,7 +8917,7 @@
         <p:spPr>
           <a:xfrm>
             <a:off x="1974070" y="8304484"/>
-            <a:ext cx="2656505" cy="320601"/>
+            <a:ext cx="2656505" cy="628377"/>
           </a:xfrm>
           <a:prstGeom prst="rect">
             <a:avLst/>
@@ -9127,8 +8950,19 @@
               <a:t>GitHub</a:t>
             </a:r>
             <a:r>
-              <a:rPr lang="en-US" sz="2000" spc="180" dirty="0"/>
-              <a:t>:</a:t>
+              <a:rPr lang="ru-RU" sz="2000" spc="180" dirty="0" smtClean="0"/>
+              <a:t> </a:t>
+            </a:r>
+            <a:r>
+              <a:rPr lang="en-US" sz="2000" spc="180" dirty="0" smtClean="0"/>
+              <a:t>AND</a:t>
+            </a:r>
+            <a:br>
+              <a:rPr lang="en-US" sz="2000" spc="180" dirty="0" smtClean="0"/>
+            </a:br>
+            <a:r>
+              <a:rPr lang="en-US" sz="2000" spc="180" dirty="0" smtClean="0"/>
+              <a:t>App:</a:t>
             </a:r>
             <a:endParaRPr lang="ru-RU" sz="2000" dirty="0"/>
           </a:p>
@@ -9156,8 +8990,38 @@
         </p:blipFill>
         <p:spPr>
           <a:xfrm>
-            <a:off x="3603003" y="5772101"/>
-            <a:ext cx="3882107" cy="3882107"/>
+            <a:off x="6139056" y="6631976"/>
+            <a:ext cx="2482113" cy="2482113"/>
+          </a:xfrm>
+          <a:prstGeom prst="rect">
+            <a:avLst/>
+          </a:prstGeom>
+        </p:spPr>
+      </p:pic>
+      <p:pic>
+        <p:nvPicPr>
+          <p:cNvPr id="18" name="Рисунок 17"/>
+          <p:cNvPicPr>
+            <a:picLocks noChangeAspect="1"/>
+          </p:cNvPicPr>
+          <p:nvPr/>
+        </p:nvPicPr>
+        <p:blipFill>
+          <a:blip r:embed="rId6" cstate="print">
+            <a:extLst>
+              <a:ext uri="{28A0092B-C50C-407E-A947-70E740481C1C}">
+                <a14:useLocalDpi xmlns:a14="http://schemas.microsoft.com/office/drawing/2010/main" val="0"/>
+              </a:ext>
+            </a:extLst>
+          </a:blip>
+          <a:stretch>
+            <a:fillRect/>
+          </a:stretch>
+        </p:blipFill>
+        <p:spPr>
+          <a:xfrm>
+            <a:off x="3561195" y="6628022"/>
+            <a:ext cx="2528629" cy="2528629"/>
           </a:xfrm>
           <a:prstGeom prst="rect">
             <a:avLst/>
